--- a/Makale2_Sosyal_Beceri_UDA_Ozet.pptx
+++ b/Makale2_Sosyal_Beceri_UDA_Ozet.pptx
@@ -6014,7 +6014,7 @@
               <a:rPr sz="2400" b="0">
                 <a:latin typeface="Times New Roman"/>
               </a:rPr>
-              <a:t>[Ad Soyad]</a:t>
+              <a:t/>
             </a:r>
           </a:p>
           <a:p>
@@ -6022,7 +6022,7 @@
               <a:rPr sz="2400" b="0">
                 <a:latin typeface="Times New Roman"/>
               </a:rPr>
-              <a:t>[Öğrenci No]</a:t>
+              <a:t/>
             </a:r>
           </a:p>
           <a:p>

--- a/Makale2_Sosyal_Beceri_UDA_Ozet.pptx
+++ b/Makale2_Sosyal_Beceri_UDA_Ozet.pptx
@@ -3618,7 +3618,7 @@
           <a:p>
             <a:fld id="{F302176B-0E47-46AC-8F43-DAB4B8A37D06}" type="slidenum">
               <a:rPr lang="tr-TR" smtClean="0"/>
-              <a:t>‹#›</a:t>
+              <a:t>1</a:t>
             </a:fld>
             <a:endParaRPr lang="tr-TR"/>
           </a:p>
@@ -3753,7 +3753,7 @@
           <a:p>
             <a:fld id="{F302176B-0E47-46AC-8F43-DAB4B8A37D06}" type="slidenum">
               <a:rPr lang="tr-TR" smtClean="0"/>
-              <a:t>‹#›</a:t>
+              <a:t>10</a:t>
             </a:fld>
             <a:endParaRPr lang="tr-TR"/>
           </a:p>
@@ -4206,7 +4206,7 @@
           <a:p>
             <a:fld id="{F302176B-0E47-46AC-8F43-DAB4B8A37D06}" type="slidenum">
               <a:rPr lang="tr-TR" smtClean="0"/>
-              <a:t>‹#›</a:t>
+              <a:t>11</a:t>
             </a:fld>
             <a:endParaRPr lang="tr-TR"/>
           </a:p>
@@ -4328,7 +4328,7 @@
           <a:p>
             <a:fld id="{F302176B-0E47-46AC-8F43-DAB4B8A37D06}" type="slidenum">
               <a:rPr lang="tr-TR" smtClean="0"/>
-              <a:t>‹#›</a:t>
+              <a:t>12</a:t>
             </a:fld>
             <a:endParaRPr lang="tr-TR"/>
           </a:p>
@@ -4715,7 +4715,7 @@
           <a:p>
             <a:fld id="{F302176B-0E47-46AC-8F43-DAB4B8A37D06}" type="slidenum">
               <a:rPr lang="tr-TR" smtClean="0"/>
-              <a:t>‹#›</a:t>
+              <a:t>13</a:t>
             </a:fld>
             <a:endParaRPr lang="tr-TR"/>
           </a:p>
@@ -4837,7 +4837,7 @@
           <a:p>
             <a:fld id="{F302176B-0E47-46AC-8F43-DAB4B8A37D06}" type="slidenum">
               <a:rPr lang="tr-TR" smtClean="0"/>
-              <a:t>‹#›</a:t>
+              <a:t>14</a:t>
             </a:fld>
             <a:endParaRPr lang="tr-TR"/>
           </a:p>
@@ -5152,7 +5152,7 @@
           <a:p>
             <a:fld id="{F302176B-0E47-46AC-8F43-DAB4B8A37D06}" type="slidenum">
               <a:rPr lang="tr-TR" smtClean="0"/>
-              <a:t>‹#›</a:t>
+              <a:t>15</a:t>
             </a:fld>
             <a:endParaRPr lang="tr-TR"/>
           </a:p>
@@ -5405,7 +5405,7 @@
           <a:p>
             <a:fld id="{F302176B-0E47-46AC-8F43-DAB4B8A37D06}" type="slidenum">
               <a:rPr lang="tr-TR" smtClean="0"/>
-              <a:t>‹#›</a:t>
+              <a:t>16</a:t>
             </a:fld>
             <a:endParaRPr lang="tr-TR"/>
           </a:p>
@@ -5540,7 +5540,7 @@
           <a:p>
             <a:fld id="{F302176B-0E47-46AC-8F43-DAB4B8A37D06}" type="slidenum">
               <a:rPr lang="tr-TR" smtClean="0"/>
-              <a:t>‹#›</a:t>
+              <a:t>17</a:t>
             </a:fld>
             <a:endParaRPr lang="tr-TR"/>
           </a:p>
@@ -5662,7 +5662,7 @@
           <a:p>
             <a:fld id="{F302176B-0E47-46AC-8F43-DAB4B8A37D06}" type="slidenum">
               <a:rPr lang="tr-TR" smtClean="0"/>
-              <a:t>‹#›</a:t>
+              <a:t>18</a:t>
             </a:fld>
             <a:endParaRPr lang="tr-TR"/>
           </a:p>
@@ -5823,7 +5823,7 @@
           <a:p>
             <a:fld id="{F302176B-0E47-46AC-8F43-DAB4B8A37D06}" type="slidenum">
               <a:rPr lang="tr-TR" smtClean="0"/>
-              <a:t>‹#›</a:t>
+              <a:t>19</a:t>
             </a:fld>
             <a:endParaRPr lang="tr-TR"/>
           </a:p>
@@ -5945,7 +5945,7 @@
           <a:p>
             <a:fld id="{F302176B-0E47-46AC-8F43-DAB4B8A37D06}" type="slidenum">
               <a:rPr lang="tr-TR" smtClean="0"/>
-              <a:t>‹#›</a:t>
+              <a:t>2</a:t>
             </a:fld>
             <a:endParaRPr lang="tr-TR"/>
           </a:p>
@@ -6069,7 +6069,7 @@
           <a:p>
             <a:fld id="{F302176B-0E47-46AC-8F43-DAB4B8A37D06}" type="slidenum">
               <a:rPr lang="tr-TR" smtClean="0"/>
-              <a:t>‹#›</a:t>
+              <a:t>20</a:t>
             </a:fld>
             <a:endParaRPr lang="tr-TR"/>
           </a:p>
@@ -6191,7 +6191,7 @@
           <a:p>
             <a:fld id="{F302176B-0E47-46AC-8F43-DAB4B8A37D06}" type="slidenum">
               <a:rPr lang="tr-TR" smtClean="0"/>
-              <a:t>‹#›</a:t>
+              <a:t>3</a:t>
             </a:fld>
             <a:endParaRPr lang="tr-TR"/>
           </a:p>
@@ -6326,7 +6326,7 @@
           <a:p>
             <a:fld id="{F302176B-0E47-46AC-8F43-DAB4B8A37D06}" type="slidenum">
               <a:rPr lang="tr-TR" smtClean="0"/>
-              <a:t>‹#›</a:t>
+              <a:t>4</a:t>
             </a:fld>
             <a:endParaRPr lang="tr-TR"/>
           </a:p>
@@ -6448,7 +6448,7 @@
           <a:p>
             <a:fld id="{F302176B-0E47-46AC-8F43-DAB4B8A37D06}" type="slidenum">
               <a:rPr lang="tr-TR" smtClean="0"/>
-              <a:t>‹#›</a:t>
+              <a:t>5</a:t>
             </a:fld>
             <a:endParaRPr lang="tr-TR"/>
           </a:p>
@@ -6602,7 +6602,7 @@
           <a:p>
             <a:fld id="{F302176B-0E47-46AC-8F43-DAB4B8A37D06}" type="slidenum">
               <a:rPr lang="tr-TR" smtClean="0"/>
-              <a:t>‹#›</a:t>
+              <a:t>6</a:t>
             </a:fld>
             <a:endParaRPr lang="tr-TR"/>
           </a:p>
@@ -6737,7 +6737,7 @@
           <a:p>
             <a:fld id="{F302176B-0E47-46AC-8F43-DAB4B8A37D06}" type="slidenum">
               <a:rPr lang="tr-TR" smtClean="0"/>
-              <a:t>‹#›</a:t>
+              <a:t>7</a:t>
             </a:fld>
             <a:endParaRPr lang="tr-TR"/>
           </a:p>
@@ -6898,7 +6898,7 @@
           <a:p>
             <a:fld id="{F302176B-0E47-46AC-8F43-DAB4B8A37D06}" type="slidenum">
               <a:rPr lang="tr-TR" smtClean="0"/>
-              <a:t>‹#›</a:t>
+              <a:t>8</a:t>
             </a:fld>
             <a:endParaRPr lang="tr-TR"/>
           </a:p>
@@ -7007,7 +7007,7 @@
           <a:p>
             <a:fld id="{F302176B-0E47-46AC-8F43-DAB4B8A37D06}" type="slidenum">
               <a:rPr lang="tr-TR" smtClean="0"/>
-              <a:t>‹#›</a:t>
+              <a:t>9</a:t>
             </a:fld>
             <a:endParaRPr lang="tr-TR"/>
           </a:p>
